--- a/dist/초5/수학/자료/초5_수학_자료_02_일이일어날가능성.pptx
+++ b/dist/초5/수학/자료/초5_수학_자료_02_일이일어날가능성.pptx
@@ -119,19 +119,19 @@
   <p:extLst>
     <p:ext uri="{521415D9-36F7-43E2-AB2F-B90AF26B5E84}">
       <p14:sectionLst xmlns:p14="http://schemas.microsoft.com/office/powerpoint/2010/main">
-        <p14:section name="도입" id="{176deaed-05ae-a1b2-de05-54d413ec7bc0}">
+        <p14:section name="도입" id="{0ebbc90e-0777-2b03-8165-d8442004e353}">
           <p14:sldIdLst>
             <p14:sldId id="256"/>
             <p14:sldId id="257"/>
           </p14:sldIdLst>
         </p14:section>
-        <p14:section name="개념" id="{bd408f01-3dc9-14c9-32f6-fccd8d4a71cc}">
+        <p14:section name="개념" id="{967500b8-67d7-75d5-5f63-7cbb13fe1312}">
           <p14:sldIdLst>
             <p14:sldId id="258"/>
             <p14:sldId id="261"/>
           </p14:sldIdLst>
         </p14:section>
-        <p14:section name="연습" id="{59fec43a-bdc3-03b2-8a8c-85ad1ff378be}">
+        <p14:section name="연습" id="{7e68400f-55a3-f958-4edf-7c65c80f61d5}">
           <p14:sldIdLst>
             <p14:sldId id="259"/>
             <p14:sldId id="260"/>
@@ -139,25 +139,25 @@
             <p14:sldId id="263"/>
           </p14:sldIdLst>
         </p14:section>
-        <p14:section name="개념" id="{69cd9efb-e889-607f-1bfb-3ea77e134210}">
+        <p14:section name="개념" id="{b73cecc5-38f8-0408-cfce-0ae59f9fb8d9}">
           <p14:sldIdLst/>
         </p14:section>
-        <p14:section name="연습" id="{23381ce3-e041-01bb-65df-e5c6d37662d7}">
+        <p14:section name="연습" id="{171cb678-a635-ae6f-3863-5f81a2f00558}">
           <p14:sldIdLst/>
         </p14:section>
-        <p14:section name="확인" id="{ed5ff920-7fd8-55fd-040c-a4099dd09cfb}">
+        <p14:section name="확인" id="{adb99960-07c7-004c-c6af-32b863b45ce2}">
           <p14:sldIdLst>
             <p14:sldId id="264"/>
             <p14:sldId id="265"/>
             <p14:sldId id="266"/>
           </p14:sldIdLst>
         </p14:section>
-        <p14:section name="정리" id="{4181e2da-56e8-6e22-271c-f27594e88197}">
+        <p14:section name="정리" id="{796b31f4-96f0-0b94-3a19-4119aff5a57e}">
           <p14:sldIdLst>
             <p14:sldId id="267"/>
           </p14:sldIdLst>
         </p14:section>
-        <p14:section name="보충" id="{9e4b13ca-7fa5-3b45-bef1-12701f0a4edf}">
+        <p14:section name="보충" id="{f73ec5ca-93fb-7c6a-c38f-b8179ef1a88e}">
           <p14:sldIdLst>
             <p14:sldId id="268"/>
           </p14:sldIdLst>
